--- a/public/fun/cards/beauty/beauty-07.pptx
+++ b/public/fun/cards/beauty/beauty-07.pptx
@@ -3085,7 +3085,7 @@
     <p:bg>
       <p:bgPr>
         <a:solidFill>
-          <a:srgbClr val="6E570C"/>
+          <a:srgbClr val="FF6A13"/>
         </a:solidFill>
         <a:effectLst/>
       </p:bgPr>
@@ -3099,23 +3099,23 @@
       <p:grpSpPr/>
       <p:sp>
         <p:nvSpPr>
-          <p:cNvPr id="2" name="Rectangle 1"/>
+          <p:cNvPr id="2" name="Oval 1"/>
           <p:cNvSpPr/>
           <p:nvPr/>
         </p:nvSpPr>
         <p:spPr>
           <a:xfrm>
-            <a:off x="93600" y="93600"/>
-            <a:ext cx="3052800" cy="1612800"/>
+            <a:off x="547200" y="475200"/>
+            <a:ext cx="849600" cy="849600"/>
           </a:xfrm>
-          <a:prstGeom prst="rect">
+          <a:prstGeom prst="ellipse">
             <a:avLst/>
           </a:prstGeom>
-          <a:noFill/>
-          <a:ln w="10800">
-            <a:solidFill>
-              <a:srgbClr val="D9BB57"/>
-            </a:solidFill>
+          <a:solidFill>
+            <a:srgbClr val="FF8842"/>
+          </a:solidFill>
+          <a:ln>
+            <a:noFill/>
           </a:ln>
         </p:spPr>
         <p:txBody>
@@ -3128,23 +3128,25 @@
       </p:sp>
       <p:sp>
         <p:nvSpPr>
-          <p:cNvPr id="3" name="Rectangle 2"/>
+          <p:cNvPr id="3" name="Oval 2"/>
           <p:cNvSpPr/>
           <p:nvPr/>
         </p:nvSpPr>
         <p:spPr>
           <a:xfrm>
-            <a:off x="144000" y="144000"/>
-            <a:ext cx="2952000" cy="1512000"/>
+            <a:off x="187200" y="475200"/>
+            <a:ext cx="849600" cy="849600"/>
           </a:xfrm>
-          <a:prstGeom prst="rect">
+          <a:prstGeom prst="ellipse">
             <a:avLst/>
           </a:prstGeom>
-          <a:noFill/>
-          <a:ln w="5400">
-            <a:solidFill>
-              <a:srgbClr val="857233"/>
-            </a:solidFill>
+          <a:solidFill>
+            <a:srgbClr val="12151C">
+              <a:alpha val="92000"/>
+            </a:srgbClr>
+          </a:solidFill>
+          <a:ln>
+            <a:noFill/>
           </a:ln>
         </p:spPr>
         <p:txBody>
@@ -3163,8 +3165,8 @@
         </p:nvSpPr>
         <p:spPr>
           <a:xfrm>
-            <a:off x="360000" y="280800"/>
-            <a:ext cx="2520000" cy="100800"/>
+            <a:off x="1692000" y="223200"/>
+            <a:ext cx="1296000" cy="133351"/>
           </a:xfrm>
           <a:prstGeom prst="rect">
             <a:avLst/>
@@ -3177,15 +3179,15 @@
           </a:bodyPr>
           <a:lstStyle/>
           <a:p>
-            <a:pPr algn="ctr">
+            <a:pPr algn="l">
               <a:lnSpc>
                 <a:spcPts val="1015"/>
               </a:lnSpc>
             </a:pPr>
             <a:r>
-              <a:rPr sz="700" b="1" spc="400">
+              <a:rPr sz="700" b="1" spc="200">
                 <a:solidFill>
-                  <a:srgbClr val="D9D3BF"/>
+                  <a:srgbClr val="46281A"/>
                 </a:solidFill>
                 <a:latin typeface="맑은 고딕"/>
                 <a:ea typeface="맑은 고딕"/>
@@ -3203,8 +3205,8 @@
         </p:nvSpPr>
         <p:spPr>
           <a:xfrm>
-            <a:off x="360000" y="468000"/>
-            <a:ext cx="2520000" cy="313692"/>
+            <a:off x="1692000" y="540000"/>
+            <a:ext cx="1368000" cy="360000"/>
           </a:xfrm>
           <a:prstGeom prst="rect">
             <a:avLst/>
@@ -3217,18 +3219,18 @@
           </a:bodyPr>
           <a:lstStyle/>
           <a:p>
-            <a:pPr algn="ctr">
+            <a:pPr algn="l">
               <a:lnSpc>
-                <a:spcPts val="2755"/>
+                <a:spcPts val="3190"/>
               </a:lnSpc>
             </a:pPr>
             <a:r>
-              <a:rPr sz="1900" b="1" spc="50">
+              <a:rPr sz="2200" b="1">
                 <a:solidFill>
-                  <a:srgbClr val="FFFFFF"/>
+                  <a:srgbClr val="12151C"/>
                 </a:solidFill>
-                <a:latin typeface="바탕"/>
-                <a:ea typeface="바탕"/>
+                <a:latin typeface="맑은 고딕"/>
+                <a:ea typeface="맑은 고딕"/>
               </a:rPr>
               <a:t>조하린</a:t>
             </a:r>
@@ -3243,8 +3245,8 @@
         </p:nvSpPr>
         <p:spPr>
           <a:xfrm>
-            <a:off x="360000" y="784800"/>
-            <a:ext cx="2520000" cy="122400"/>
+            <a:off x="1692000" y="943200"/>
+            <a:ext cx="1368000" cy="171451"/>
           </a:xfrm>
           <a:prstGeom prst="rect">
             <a:avLst/>
@@ -3257,15 +3259,15 @@
           </a:bodyPr>
           <a:lstStyle/>
           <a:p>
-            <a:pPr algn="ctr">
+            <a:pPr algn="l">
               <a:lnSpc>
-                <a:spcPts val="1232"/>
+                <a:spcPts val="1305"/>
               </a:lnSpc>
             </a:pPr>
             <a:r>
-              <a:rPr sz="850" b="1">
+              <a:rPr sz="900" b="0">
                 <a:solidFill>
-                  <a:srgbClr val="E6D392"/>
+                  <a:srgbClr val="46281A"/>
                 </a:solidFill>
                 <a:latin typeface="맑은 고딕"/>
                 <a:ea typeface="맑은 고딕"/>
@@ -3283,14 +3285,14 @@
         </p:nvSpPr>
         <p:spPr>
           <a:xfrm>
-            <a:off x="1530000" y="993600"/>
-            <a:ext cx="180000" cy="10800"/>
+            <a:off x="1692000" y="1195200"/>
+            <a:ext cx="144000" cy="18000"/>
           </a:xfrm>
           <a:prstGeom prst="rect">
             <a:avLst/>
           </a:prstGeom>
           <a:solidFill>
-            <a:srgbClr val="D9BB57"/>
+            <a:srgbClr val="12151C"/>
           </a:solidFill>
           <a:ln>
             <a:noFill/>
@@ -3312,8 +3314,8 @@
         </p:nvSpPr>
         <p:spPr>
           <a:xfrm>
-            <a:off x="360000" y="1087200"/>
-            <a:ext cx="2520000" cy="108000"/>
+            <a:off x="1692000" y="1328400"/>
+            <a:ext cx="331200" cy="99061"/>
           </a:xfrm>
           <a:prstGeom prst="rect">
             <a:avLst/>
@@ -3326,20 +3328,20 @@
           </a:bodyPr>
           <a:lstStyle/>
           <a:p>
-            <a:pPr algn="ctr">
+            <a:pPr algn="l">
               <a:lnSpc>
-                <a:spcPts val="1087"/>
+                <a:spcPts val="754"/>
               </a:lnSpc>
             </a:pPr>
             <a:r>
-              <a:rPr sz="750" b="0">
+              <a:rPr sz="520" b="1" spc="120">
                 <a:solidFill>
-                  <a:srgbClr val="FFFFFF"/>
+                  <a:srgbClr val="46281A"/>
                 </a:solidFill>
                 <a:latin typeface="맑은 고딕"/>
                 <a:ea typeface="맑은 고딕"/>
               </a:rPr>
-              <a:t>010-1234-5678</a:t>
+              <a:t>TEL</a:t>
             </a:r>
           </a:p>
         </p:txBody>
@@ -3352,8 +3354,8 @@
         </p:nvSpPr>
         <p:spPr>
           <a:xfrm>
-            <a:off x="360000" y="1209600"/>
-            <a:ext cx="2520000" cy="108000"/>
+            <a:off x="2023200" y="1317600"/>
+            <a:ext cx="1188000" cy="125731"/>
           </a:xfrm>
           <a:prstGeom prst="rect">
             <a:avLst/>
@@ -3366,20 +3368,20 @@
           </a:bodyPr>
           <a:lstStyle/>
           <a:p>
-            <a:pPr algn="ctr">
+            <a:pPr algn="l">
               <a:lnSpc>
-                <a:spcPts val="1087"/>
+                <a:spcPts val="956"/>
               </a:lnSpc>
             </a:pPr>
             <a:r>
-              <a:rPr sz="750" b="0">
+              <a:rPr sz="660" b="0">
                 <a:solidFill>
-                  <a:srgbClr val="FFFFFF"/>
+                  <a:srgbClr val="12151C"/>
                 </a:solidFill>
                 <a:latin typeface="맑은 고딕"/>
                 <a:ea typeface="맑은 고딕"/>
               </a:rPr>
-              <a:t>name@example.com</a:t>
+              <a:t>010-1234-5678</a:t>
             </a:r>
           </a:p>
         </p:txBody>
@@ -3392,8 +3394,8 @@
         </p:nvSpPr>
         <p:spPr>
           <a:xfrm>
-            <a:off x="360000" y="1332000"/>
-            <a:ext cx="2520000" cy="108000"/>
+            <a:off x="1692000" y="1458000"/>
+            <a:ext cx="331200" cy="99061"/>
           </a:xfrm>
           <a:prstGeom prst="rect">
             <a:avLst/>
@@ -3406,112 +3408,141 @@
           </a:bodyPr>
           <a:lstStyle/>
           <a:p>
-            <a:pPr algn="ctr">
+            <a:pPr algn="l">
               <a:lnSpc>
-                <a:spcPts val="1015"/>
+                <a:spcPts val="754"/>
               </a:lnSpc>
             </a:pPr>
             <a:r>
-              <a:rPr sz="700" b="0">
+              <a:rPr sz="520" b="1" spc="120">
                 <a:solidFill>
-                  <a:srgbClr val="D9D3BF"/>
+                  <a:srgbClr val="46281A"/>
+                </a:solidFill>
+                <a:latin typeface="맑은 고딕"/>
+                <a:ea typeface="맑은 고딕"/>
+              </a:rPr>
+              <a:t>MAIL</a:t>
+            </a:r>
+          </a:p>
+        </p:txBody>
+      </p:sp>
+      <p:sp>
+        <p:nvSpPr>
+          <p:cNvPr id="11" name="텍스트"/>
+          <p:cNvSpPr txBox="1"/>
+          <p:nvPr/>
+        </p:nvSpPr>
+        <p:spPr>
+          <a:xfrm>
+            <a:off x="2023200" y="1447200"/>
+            <a:ext cx="1188000" cy="125731"/>
+          </a:xfrm>
+          <a:prstGeom prst="rect">
+            <a:avLst/>
+          </a:prstGeom>
+          <a:noFill/>
+        </p:spPr>
+        <p:txBody>
+          <a:bodyPr wrap="square" lIns="0" rIns="0" tIns="0" bIns="0" anchor="t">
+            <a:spAutoFit/>
+          </a:bodyPr>
+          <a:lstStyle/>
+          <a:p>
+            <a:pPr algn="l">
+              <a:lnSpc>
+                <a:spcPts val="956"/>
+              </a:lnSpc>
+            </a:pPr>
+            <a:r>
+              <a:rPr sz="660" b="0">
+                <a:solidFill>
+                  <a:srgbClr val="12151C"/>
+                </a:solidFill>
+                <a:latin typeface="맑은 고딕"/>
+                <a:ea typeface="맑은 고딕"/>
+              </a:rPr>
+              <a:t>name@example.com</a:t>
+            </a:r>
+          </a:p>
+        </p:txBody>
+      </p:sp>
+      <p:sp>
+        <p:nvSpPr>
+          <p:cNvPr id="12" name="텍스트"/>
+          <p:cNvSpPr txBox="1"/>
+          <p:nvPr/>
+        </p:nvSpPr>
+        <p:spPr>
+          <a:xfrm>
+            <a:off x="1692000" y="1587600"/>
+            <a:ext cx="331200" cy="99061"/>
+          </a:xfrm>
+          <a:prstGeom prst="rect">
+            <a:avLst/>
+          </a:prstGeom>
+          <a:noFill/>
+        </p:spPr>
+        <p:txBody>
+          <a:bodyPr wrap="square" lIns="0" rIns="0" tIns="0" bIns="0" anchor="t">
+            <a:spAutoFit/>
+          </a:bodyPr>
+          <a:lstStyle/>
+          <a:p>
+            <a:pPr algn="l">
+              <a:lnSpc>
+                <a:spcPts val="754"/>
+              </a:lnSpc>
+            </a:pPr>
+            <a:r>
+              <a:rPr sz="520" b="1" spc="120">
+                <a:solidFill>
+                  <a:srgbClr val="46281A"/>
+                </a:solidFill>
+                <a:latin typeface="맑은 고딕"/>
+                <a:ea typeface="맑은 고딕"/>
+              </a:rPr>
+              <a:t>ADDR</a:t>
+            </a:r>
+          </a:p>
+        </p:txBody>
+      </p:sp>
+      <p:sp>
+        <p:nvSpPr>
+          <p:cNvPr id="13" name="텍스트"/>
+          <p:cNvSpPr txBox="1"/>
+          <p:nvPr/>
+        </p:nvSpPr>
+        <p:spPr>
+          <a:xfrm>
+            <a:off x="2023200" y="1576800"/>
+            <a:ext cx="1188000" cy="125731"/>
+          </a:xfrm>
+          <a:prstGeom prst="rect">
+            <a:avLst/>
+          </a:prstGeom>
+          <a:noFill/>
+        </p:spPr>
+        <p:txBody>
+          <a:bodyPr wrap="square" lIns="0" rIns="0" tIns="0" bIns="0" anchor="t">
+            <a:spAutoFit/>
+          </a:bodyPr>
+          <a:lstStyle/>
+          <a:p>
+            <a:pPr algn="l">
+              <a:lnSpc>
+                <a:spcPts val="956"/>
+              </a:lnSpc>
+            </a:pPr>
+            <a:r>
+              <a:rPr sz="660" b="0">
+                <a:solidFill>
+                  <a:srgbClr val="12151C"/>
                 </a:solidFill>
                 <a:latin typeface="맑은 고딕"/>
                 <a:ea typeface="맑은 고딕"/>
               </a:rPr>
               <a:t>주소를 입력해 주세요</a:t>
             </a:r>
-          </a:p>
-        </p:txBody>
-      </p:sp>
-      <p:sp>
-        <p:nvSpPr>
-          <p:cNvPr id="11" name="Oval 10"/>
-          <p:cNvSpPr/>
-          <p:nvPr/>
-        </p:nvSpPr>
-        <p:spPr>
-          <a:xfrm>
-            <a:off x="1581696" y="1490544"/>
-            <a:ext cx="76608" cy="87552"/>
-          </a:xfrm>
-          <a:prstGeom prst="ellipse">
-            <a:avLst/>
-          </a:prstGeom>
-          <a:noFill/>
-          <a:ln w="10944">
-            <a:solidFill>
-              <a:srgbClr val="D9BB57"/>
-            </a:solidFill>
-          </a:ln>
-        </p:spPr>
-        <p:txBody>
-          <a:bodyPr rtlCol="0" anchor="ctr"/>
-          <a:lstStyle/>
-          <a:p>
-            <a:pPr algn="ctr"/>
-          </a:p>
-        </p:txBody>
-      </p:sp>
-      <p:sp>
-        <p:nvSpPr>
-          <p:cNvPr id="12" name="Oval 11"/>
-          <p:cNvSpPr/>
-          <p:nvPr/>
-        </p:nvSpPr>
-        <p:spPr>
-          <a:xfrm>
-            <a:off x="1594008" y="1502856"/>
-            <a:ext cx="51984" cy="62928"/>
-          </a:xfrm>
-          <a:prstGeom prst="ellipse">
-            <a:avLst/>
-          </a:prstGeom>
-          <a:solidFill>
-            <a:srgbClr val="857233">
-              <a:alpha val="35000"/>
-            </a:srgbClr>
-          </a:solidFill>
-          <a:ln>
-            <a:noFill/>
-          </a:ln>
-        </p:spPr>
-        <p:txBody>
-          <a:bodyPr rtlCol="0" anchor="ctr"/>
-          <a:lstStyle/>
-          <a:p>
-            <a:pPr algn="ctr"/>
-          </a:p>
-        </p:txBody>
-      </p:sp>
-      <p:sp>
-        <p:nvSpPr>
-          <p:cNvPr id="13" name="Rounded Rectangle 12"/>
-          <p:cNvSpPr/>
-          <p:nvPr/>
-        </p:nvSpPr>
-        <p:spPr>
-          <a:xfrm>
-            <a:off x="1613160" y="1575360"/>
-            <a:ext cx="13680" cy="41040"/>
-          </a:xfrm>
-          <a:prstGeom prst="roundRect">
-            <a:avLst>
-              <a:gd name="adj" fmla="val 50000"/>
-            </a:avLst>
-          </a:prstGeom>
-          <a:solidFill>
-            <a:srgbClr val="D9BB57"/>
-          </a:solidFill>
-          <a:ln>
-            <a:noFill/>
-          </a:ln>
-        </p:spPr>
-        <p:txBody>
-          <a:bodyPr rtlCol="0" anchor="ctr"/>
-          <a:lstStyle/>
-          <a:p>
-            <a:pPr algn="ctr"/>
           </a:p>
         </p:txBody>
       </p:sp>
@@ -3529,7 +3560,7 @@
     <p:bg>
       <p:bgPr>
         <a:solidFill>
-          <a:srgbClr val="FBF8F2"/>
+          <a:srgbClr val="FFF0E7"/>
         </a:solidFill>
         <a:effectLst/>
       </p:bgPr>
@@ -3549,14 +3580,14 @@
         </p:nvSpPr>
         <p:spPr>
           <a:xfrm>
-            <a:off x="0" y="0"/>
-            <a:ext cx="64800" cy="1800000"/>
+            <a:off x="252000" y="540000"/>
+            <a:ext cx="28800" cy="720000"/>
           </a:xfrm>
           <a:prstGeom prst="rect">
             <a:avLst/>
           </a:prstGeom>
           <a:solidFill>
-            <a:srgbClr val="3B7A91"/>
+            <a:srgbClr val="FF6A13"/>
           </a:solidFill>
           <a:ln>
             <a:noFill/>
@@ -3578,8 +3609,8 @@
         </p:nvSpPr>
         <p:spPr>
           <a:xfrm>
-            <a:off x="252000" y="432000"/>
-            <a:ext cx="2016000" cy="252000"/>
+            <a:off x="424800" y="612000"/>
+            <a:ext cx="2160000" cy="648000"/>
           </a:xfrm>
           <a:prstGeom prst="rect">
             <a:avLst/>
@@ -3594,18 +3625,18 @@
           <a:p>
             <a:pPr algn="l">
               <a:lnSpc>
-                <a:spcPts val="2465"/>
+                <a:spcPts val="1812"/>
               </a:lnSpc>
             </a:pPr>
             <a:r>
-              <a:rPr sz="1700" b="1">
+              <a:rPr sz="1250" b="1">
                 <a:solidFill>
-                  <a:srgbClr val="6E570C"/>
+                  <a:srgbClr val="12151C"/>
                 </a:solidFill>
-                <a:latin typeface="바탕"/>
-                <a:ea typeface="바탕"/>
+                <a:latin typeface="맑은 고딕"/>
+                <a:ea typeface="맑은 고딕"/>
               </a:rPr>
-              <a:t>샵 이름</a:t>
+              <a:t>편안히 쉬었다 가는 시간</a:t>
             </a:r>
           </a:p>
         </p:txBody>
@@ -3618,8 +3649,8 @@
         </p:nvSpPr>
         <p:spPr>
           <a:xfrm>
-            <a:off x="252000" y="878400"/>
-            <a:ext cx="2016000" cy="540000"/>
+            <a:off x="424800" y="1512000"/>
+            <a:ext cx="1800000" cy="123826"/>
           </a:xfrm>
           <a:prstGeom prst="rect">
             <a:avLst/>
@@ -3634,209 +3665,19 @@
           <a:p>
             <a:pPr algn="l">
               <a:lnSpc>
-                <a:spcPts val="1232"/>
+                <a:spcPts val="942"/>
               </a:lnSpc>
             </a:pPr>
             <a:r>
-              <a:rPr sz="850" b="0">
+              <a:rPr sz="650" b="1" spc="200">
                 <a:solidFill>
-                  <a:srgbClr val="776B45"/>
+                  <a:srgbClr val="6C3519"/>
                 </a:solidFill>
                 <a:latin typeface="맑은 고딕"/>
                 <a:ea typeface="맑은 고딕"/>
               </a:rPr>
-              <a:t>편안히 쉬었다 가는 시간</a:t>
-            </a:r>
-          </a:p>
-        </p:txBody>
-      </p:sp>
-      <p:sp>
-        <p:nvSpPr>
-          <p:cNvPr id="5" name="Rectangle 4"/>
-          <p:cNvSpPr/>
-          <p:nvPr/>
-        </p:nvSpPr>
-        <p:spPr>
-          <a:xfrm>
-            <a:off x="2520000" y="1080000"/>
-            <a:ext cx="504000" cy="504000"/>
-          </a:xfrm>
-          <a:prstGeom prst="rect">
-            <a:avLst/>
-          </a:prstGeom>
-          <a:noFill/>
-          <a:ln w="9000">
-            <a:solidFill>
-              <a:srgbClr val="3B7A91"/>
-            </a:solidFill>
-            <a:prstDash val="dash"/>
-          </a:ln>
-        </p:spPr>
-        <p:txBody>
-          <a:bodyPr rtlCol="0" anchor="ctr"/>
-          <a:lstStyle/>
-          <a:p>
-            <a:pPr algn="ctr"/>
-          </a:p>
-        </p:txBody>
-      </p:sp>
-      <p:sp>
-        <p:nvSpPr>
-          <p:cNvPr id="6" name="텍스트"/>
-          <p:cNvSpPr txBox="1"/>
-          <p:nvPr/>
-        </p:nvSpPr>
-        <p:spPr>
-          <a:xfrm>
-            <a:off x="2520000" y="1080000"/>
-            <a:ext cx="504000" cy="504000"/>
-          </a:xfrm>
-          <a:prstGeom prst="rect">
-            <a:avLst/>
-          </a:prstGeom>
-          <a:noFill/>
-        </p:spPr>
-        <p:txBody>
-          <a:bodyPr wrap="square" lIns="0" rIns="0" tIns="0" bIns="0" anchor="ctr">
-            <a:spAutoFit/>
-          </a:bodyPr>
-          <a:lstStyle/>
-          <a:p>
-            <a:pPr algn="ctr">
-              <a:lnSpc>
-                <a:spcPts val="1305"/>
-              </a:lnSpc>
-            </a:pPr>
-            <a:r>
-              <a:rPr sz="900" b="1">
-                <a:solidFill>
-                  <a:srgbClr val="776B45"/>
-                </a:solidFill>
-                <a:latin typeface="맑은 고딕"/>
-                <a:ea typeface="맑은 고딕"/>
-              </a:rPr>
-              <a:t>QR</a:t>
-            </a:r>
-          </a:p>
-        </p:txBody>
-      </p:sp>
-      <p:sp>
-        <p:nvSpPr>
-          <p:cNvPr id="7" name="Rectangle 6"/>
-          <p:cNvSpPr/>
-          <p:nvPr/>
-        </p:nvSpPr>
-        <p:spPr>
-          <a:xfrm>
-            <a:off x="252000" y="763200"/>
-            <a:ext cx="201600" cy="14400"/>
-          </a:xfrm>
-          <a:prstGeom prst="rect">
-            <a:avLst/>
-          </a:prstGeom>
-          <a:solidFill>
-            <a:srgbClr val="3B7A91"/>
-          </a:solidFill>
-          <a:ln>
-            <a:noFill/>
-          </a:ln>
-        </p:spPr>
-        <p:txBody>
-          <a:bodyPr rtlCol="0" anchor="ctr"/>
-          <a:lstStyle/>
-          <a:p>
-            <a:pPr algn="ctr"/>
-          </a:p>
-        </p:txBody>
-      </p:sp>
-      <p:sp>
-        <p:nvSpPr>
-          <p:cNvPr id="8" name="Oval 7"/>
-          <p:cNvSpPr/>
-          <p:nvPr/>
-        </p:nvSpPr>
-        <p:spPr>
-          <a:xfrm>
-            <a:off x="2681280" y="295920"/>
-            <a:ext cx="181440" cy="207360"/>
-          </a:xfrm>
-          <a:prstGeom prst="ellipse">
-            <a:avLst/>
-          </a:prstGeom>
-          <a:noFill/>
-          <a:ln w="25920">
-            <a:solidFill>
-              <a:srgbClr val="3B7A91"/>
-            </a:solidFill>
-          </a:ln>
-        </p:spPr>
-        <p:txBody>
-          <a:bodyPr rtlCol="0" anchor="ctr"/>
-          <a:lstStyle/>
-          <a:p>
-            <a:pPr algn="ctr"/>
-          </a:p>
-        </p:txBody>
-      </p:sp>
-      <p:sp>
-        <p:nvSpPr>
-          <p:cNvPr id="9" name="Oval 8"/>
-          <p:cNvSpPr/>
-          <p:nvPr/>
-        </p:nvSpPr>
-        <p:spPr>
-          <a:xfrm>
-            <a:off x="2710440" y="325080"/>
-            <a:ext cx="123120" cy="149040"/>
-          </a:xfrm>
-          <a:prstGeom prst="ellipse">
-            <a:avLst/>
-          </a:prstGeom>
-          <a:solidFill>
-            <a:srgbClr val="C8DAE0">
-              <a:alpha val="35000"/>
-            </a:srgbClr>
-          </a:solidFill>
-          <a:ln>
-            <a:noFill/>
-          </a:ln>
-        </p:spPr>
-        <p:txBody>
-          <a:bodyPr rtlCol="0" anchor="ctr"/>
-          <a:lstStyle/>
-          <a:p>
-            <a:pPr algn="ctr"/>
-          </a:p>
-        </p:txBody>
-      </p:sp>
-      <p:sp>
-        <p:nvSpPr>
-          <p:cNvPr id="10" name="Rounded Rectangle 9"/>
-          <p:cNvSpPr/>
-          <p:nvPr/>
-        </p:nvSpPr>
-        <p:spPr>
-          <a:xfrm>
-            <a:off x="2755800" y="496800"/>
-            <a:ext cx="32400" cy="97200"/>
-          </a:xfrm>
-          <a:prstGeom prst="roundRect">
-            <a:avLst>
-              <a:gd name="adj" fmla="val 50000"/>
-            </a:avLst>
-          </a:prstGeom>
-          <a:solidFill>
-            <a:srgbClr val="3B7A91"/>
-          </a:solidFill>
-          <a:ln>
-            <a:noFill/>
-          </a:ln>
-        </p:spPr>
-        <p:txBody>
-          <a:bodyPr rtlCol="0" anchor="ctr"/>
-          <a:lstStyle/>
-          <a:p>
-            <a:pPr algn="ctr"/>
+              <a:t>샵 이름</a:t>
+            </a:r>
           </a:p>
         </p:txBody>
       </p:sp>

--- a/public/fun/cards/beauty/beauty-07.pptx
+++ b/public/fun/cards/beauty/beauty-07.pptx
@@ -3097,196 +3097,37 @@
         <p:nvPr/>
       </p:nvGrpSpPr>
       <p:grpSpPr/>
-      <p:sp>
-        <p:nvSpPr>
-          <p:cNvPr id="2" name="Oval 1"/>
+      <p:cxnSp>
+        <p:nvCxnSpPr>
+          <p:cNvPr id="2" name="Connector 1"/>
+          <p:cNvCxnSpPr/>
+          <p:nvPr/>
+        </p:nvCxnSpPr>
+        <p:spPr>
+          <a:xfrm>
+            <a:off x="1080000" y="252000"/>
+            <a:ext cx="0" cy="1296000"/>
+          </a:xfrm>
+          <a:prstGeom prst="line">
+            <a:avLst/>
+          </a:prstGeom>
+          <a:ln w="3600">
+            <a:solidFill>
+              <a:srgbClr val="A04817"/>
+            </a:solidFill>
+          </a:ln>
+        </p:spPr>
+      </p:cxnSp>
+      <p:sp>
+        <p:nvSpPr>
+          <p:cNvPr id="3" name="Rectangle 2"/>
           <p:cNvSpPr/>
           <p:nvPr/>
         </p:nvSpPr>
         <p:spPr>
           <a:xfrm>
-            <a:off x="547200" y="475200"/>
-            <a:ext cx="849600" cy="849600"/>
-          </a:xfrm>
-          <a:prstGeom prst="ellipse">
-            <a:avLst/>
-          </a:prstGeom>
-          <a:solidFill>
-            <a:srgbClr val="FF8842"/>
-          </a:solidFill>
-          <a:ln>
-            <a:noFill/>
-          </a:ln>
-        </p:spPr>
-        <p:txBody>
-          <a:bodyPr rtlCol="0" anchor="ctr"/>
-          <a:lstStyle/>
-          <a:p>
-            <a:pPr algn="ctr"/>
-          </a:p>
-        </p:txBody>
-      </p:sp>
-      <p:sp>
-        <p:nvSpPr>
-          <p:cNvPr id="3" name="Oval 2"/>
-          <p:cNvSpPr/>
-          <p:nvPr/>
-        </p:nvSpPr>
-        <p:spPr>
-          <a:xfrm>
-            <a:off x="187200" y="475200"/>
-            <a:ext cx="849600" cy="849600"/>
-          </a:xfrm>
-          <a:prstGeom prst="ellipse">
-            <a:avLst/>
-          </a:prstGeom>
-          <a:solidFill>
-            <a:srgbClr val="12151C">
-              <a:alpha val="92000"/>
-            </a:srgbClr>
-          </a:solidFill>
-          <a:ln>
-            <a:noFill/>
-          </a:ln>
-        </p:spPr>
-        <p:txBody>
-          <a:bodyPr rtlCol="0" anchor="ctr"/>
-          <a:lstStyle/>
-          <a:p>
-            <a:pPr algn="ctr"/>
-          </a:p>
-        </p:txBody>
-      </p:sp>
-      <p:sp>
-        <p:nvSpPr>
-          <p:cNvPr id="4" name="텍스트"/>
-          <p:cNvSpPr txBox="1"/>
-          <p:nvPr/>
-        </p:nvSpPr>
-        <p:spPr>
-          <a:xfrm>
-            <a:off x="1692000" y="223200"/>
-            <a:ext cx="1296000" cy="133351"/>
-          </a:xfrm>
-          <a:prstGeom prst="rect">
-            <a:avLst/>
-          </a:prstGeom>
-          <a:noFill/>
-        </p:spPr>
-        <p:txBody>
-          <a:bodyPr wrap="square" lIns="0" rIns="0" tIns="0" bIns="0" anchor="t">
-            <a:spAutoFit/>
-          </a:bodyPr>
-          <a:lstStyle/>
-          <a:p>
-            <a:pPr algn="l">
-              <a:lnSpc>
-                <a:spcPts val="1015"/>
-              </a:lnSpc>
-            </a:pPr>
-            <a:r>
-              <a:rPr sz="700" b="1" spc="200">
-                <a:solidFill>
-                  <a:srgbClr val="46281A"/>
-                </a:solidFill>
-                <a:latin typeface="맑은 고딕"/>
-                <a:ea typeface="맑은 고딕"/>
-              </a:rPr>
-              <a:t>샵 이름</a:t>
-            </a:r>
-          </a:p>
-        </p:txBody>
-      </p:sp>
-      <p:sp>
-        <p:nvSpPr>
-          <p:cNvPr id="5" name="텍스트"/>
-          <p:cNvSpPr txBox="1"/>
-          <p:nvPr/>
-        </p:nvSpPr>
-        <p:spPr>
-          <a:xfrm>
-            <a:off x="1692000" y="540000"/>
-            <a:ext cx="1368000" cy="360000"/>
-          </a:xfrm>
-          <a:prstGeom prst="rect">
-            <a:avLst/>
-          </a:prstGeom>
-          <a:noFill/>
-        </p:spPr>
-        <p:txBody>
-          <a:bodyPr wrap="square" lIns="0" rIns="0" tIns="0" bIns="0" anchor="t">
-            <a:spAutoFit/>
-          </a:bodyPr>
-          <a:lstStyle/>
-          <a:p>
-            <a:pPr algn="l">
-              <a:lnSpc>
-                <a:spcPts val="3190"/>
-              </a:lnSpc>
-            </a:pPr>
-            <a:r>
-              <a:rPr sz="2200" b="1">
-                <a:solidFill>
-                  <a:srgbClr val="12151C"/>
-                </a:solidFill>
-                <a:latin typeface="맑은 고딕"/>
-                <a:ea typeface="맑은 고딕"/>
-              </a:rPr>
-              <a:t>조하린</a:t>
-            </a:r>
-          </a:p>
-        </p:txBody>
-      </p:sp>
-      <p:sp>
-        <p:nvSpPr>
-          <p:cNvPr id="6" name="텍스트"/>
-          <p:cNvSpPr txBox="1"/>
-          <p:nvPr/>
-        </p:nvSpPr>
-        <p:spPr>
-          <a:xfrm>
-            <a:off x="1692000" y="943200"/>
-            <a:ext cx="1368000" cy="171451"/>
-          </a:xfrm>
-          <a:prstGeom prst="rect">
-            <a:avLst/>
-          </a:prstGeom>
-          <a:noFill/>
-        </p:spPr>
-        <p:txBody>
-          <a:bodyPr wrap="square" lIns="0" rIns="0" tIns="0" bIns="0" anchor="t">
-            <a:spAutoFit/>
-          </a:bodyPr>
-          <a:lstStyle/>
-          <a:p>
-            <a:pPr algn="l">
-              <a:lnSpc>
-                <a:spcPts val="1305"/>
-              </a:lnSpc>
-            </a:pPr>
-            <a:r>
-              <a:rPr sz="900" b="0">
-                <a:solidFill>
-                  <a:srgbClr val="46281A"/>
-                </a:solidFill>
-                <a:latin typeface="맑은 고딕"/>
-                <a:ea typeface="맑은 고딕"/>
-              </a:rPr>
-              <a:t>바버 · 대표</a:t>
-            </a:r>
-          </a:p>
-        </p:txBody>
-      </p:sp>
-      <p:sp>
-        <p:nvSpPr>
-          <p:cNvPr id="7" name="Rectangle 6"/>
-          <p:cNvSpPr/>
-          <p:nvPr/>
-        </p:nvSpPr>
-        <p:spPr>
-          <a:xfrm>
-            <a:off x="1692000" y="1195200"/>
-            <a:ext cx="144000" cy="18000"/>
+            <a:off x="1069200" y="252000"/>
+            <a:ext cx="21600" cy="201600"/>
           </a:xfrm>
           <a:prstGeom prst="rect">
             <a:avLst/>
@@ -3308,14 +3149,14 @@
       </p:sp>
       <p:sp>
         <p:nvSpPr>
-          <p:cNvPr id="8" name="텍스트"/>
+          <p:cNvPr id="4" name="텍스트"/>
           <p:cNvSpPr txBox="1"/>
           <p:nvPr/>
         </p:nvSpPr>
         <p:spPr>
           <a:xfrm>
-            <a:off x="1692000" y="1328400"/>
-            <a:ext cx="331200" cy="99061"/>
+            <a:off x="252000" y="252000"/>
+            <a:ext cx="756000" cy="123826"/>
           </a:xfrm>
           <a:prstGeom prst="rect">
             <a:avLst/>
@@ -3330,11 +3171,221 @@
           <a:p>
             <a:pPr algn="l">
               <a:lnSpc>
-                <a:spcPts val="754"/>
+                <a:spcPts val="942"/>
               </a:lnSpc>
             </a:pPr>
             <a:r>
-              <a:rPr sz="520" b="1" spc="120">
+              <a:rPr sz="650" b="1" spc="220">
+                <a:solidFill>
+                  <a:srgbClr val="46281A"/>
+                </a:solidFill>
+                <a:latin typeface="맑은 고딕"/>
+                <a:ea typeface="맑은 고딕"/>
+              </a:rPr>
+              <a:t>샵 이름</a:t>
+            </a:r>
+          </a:p>
+        </p:txBody>
+      </p:sp>
+      <p:sp>
+        <p:nvSpPr>
+          <p:cNvPr id="5" name="Oval 4"/>
+          <p:cNvSpPr/>
+          <p:nvPr/>
+        </p:nvSpPr>
+        <p:spPr>
+          <a:xfrm>
+            <a:off x="273600" y="734400"/>
+            <a:ext cx="244800" cy="244800"/>
+          </a:xfrm>
+          <a:prstGeom prst="ellipse">
+            <a:avLst/>
+          </a:prstGeom>
+          <a:noFill/>
+          <a:ln w="5040">
+            <a:solidFill>
+              <a:srgbClr val="12151C"/>
+            </a:solidFill>
+          </a:ln>
+        </p:spPr>
+        <p:txBody>
+          <a:bodyPr rtlCol="0" anchor="ctr"/>
+          <a:lstStyle/>
+          <a:p>
+            <a:pPr algn="ctr"/>
+          </a:p>
+        </p:txBody>
+      </p:sp>
+      <p:sp>
+        <p:nvSpPr>
+          <p:cNvPr id="6" name="텍스트"/>
+          <p:cNvSpPr txBox="1"/>
+          <p:nvPr/>
+        </p:nvSpPr>
+        <p:spPr>
+          <a:xfrm>
+            <a:off x="252000" y="734400"/>
+            <a:ext cx="288000" cy="252000"/>
+          </a:xfrm>
+          <a:prstGeom prst="rect">
+            <a:avLst/>
+          </a:prstGeom>
+          <a:noFill/>
+        </p:spPr>
+        <p:txBody>
+          <a:bodyPr wrap="square" lIns="0" rIns="0" tIns="0" bIns="0" anchor="ctr">
+            <a:spAutoFit/>
+          </a:bodyPr>
+          <a:lstStyle/>
+          <a:p>
+            <a:pPr algn="ctr">
+              <a:lnSpc>
+                <a:spcPts val="1305"/>
+              </a:lnSpc>
+            </a:pPr>
+            <a:r>
+              <a:rPr sz="900" b="1">
+                <a:solidFill>
+                  <a:srgbClr val="12151C"/>
+                </a:solidFill>
+                <a:latin typeface="맑은 고딕"/>
+                <a:ea typeface="맑은 고딕"/>
+              </a:rPr>
+              <a:t>샵</a:t>
+            </a:r>
+          </a:p>
+        </p:txBody>
+      </p:sp>
+      <p:sp>
+        <p:nvSpPr>
+          <p:cNvPr id="7" name="텍스트"/>
+          <p:cNvSpPr txBox="1"/>
+          <p:nvPr/>
+        </p:nvSpPr>
+        <p:spPr>
+          <a:xfrm>
+            <a:off x="1260000" y="432000"/>
+            <a:ext cx="1800000" cy="237600"/>
+          </a:xfrm>
+          <a:prstGeom prst="rect">
+            <a:avLst/>
+          </a:prstGeom>
+          <a:noFill/>
+        </p:spPr>
+        <p:txBody>
+          <a:bodyPr wrap="square" lIns="0" rIns="0" tIns="0" bIns="0" anchor="t">
+            <a:spAutoFit/>
+          </a:bodyPr>
+          <a:lstStyle/>
+          <a:p>
+            <a:pPr algn="l">
+              <a:lnSpc>
+                <a:spcPts val="1957"/>
+              </a:lnSpc>
+            </a:pPr>
+            <a:r>
+              <a:rPr sz="1350" b="1" spc="120">
+                <a:solidFill>
+                  <a:srgbClr val="12151C"/>
+                </a:solidFill>
+                <a:latin typeface="맑은 고딕"/>
+                <a:ea typeface="맑은 고딕"/>
+              </a:rPr>
+              <a:t>조하린</a:t>
+            </a:r>
+          </a:p>
+        </p:txBody>
+      </p:sp>
+      <p:sp>
+        <p:nvSpPr>
+          <p:cNvPr id="8" name="텍스트"/>
+          <p:cNvSpPr txBox="1"/>
+          <p:nvPr/>
+        </p:nvSpPr>
+        <p:spPr>
+          <a:xfrm>
+            <a:off x="1260000" y="684000"/>
+            <a:ext cx="1800000" cy="133351"/>
+          </a:xfrm>
+          <a:prstGeom prst="rect">
+            <a:avLst/>
+          </a:prstGeom>
+          <a:noFill/>
+        </p:spPr>
+        <p:txBody>
+          <a:bodyPr wrap="square" lIns="0" rIns="0" tIns="0" bIns="0" anchor="t">
+            <a:spAutoFit/>
+          </a:bodyPr>
+          <a:lstStyle/>
+          <a:p>
+            <a:pPr algn="l">
+              <a:lnSpc>
+                <a:spcPts val="1015"/>
+              </a:lnSpc>
+            </a:pPr>
+            <a:r>
+              <a:rPr sz="700" b="0" spc="60">
+                <a:solidFill>
+                  <a:srgbClr val="46281A"/>
+                </a:solidFill>
+                <a:latin typeface="맑은 고딕"/>
+                <a:ea typeface="맑은 고딕"/>
+              </a:rPr>
+              <a:t>바버 · 대표</a:t>
+            </a:r>
+          </a:p>
+        </p:txBody>
+      </p:sp>
+      <p:cxnSp>
+        <p:nvCxnSpPr>
+          <p:cNvPr id="9" name="Connector 8"/>
+          <p:cNvCxnSpPr/>
+          <p:nvPr/>
+        </p:nvCxnSpPr>
+        <p:spPr>
+          <a:xfrm>
+            <a:off x="1260000" y="943200"/>
+            <a:ext cx="1728000" cy="0"/>
+          </a:xfrm>
+          <a:prstGeom prst="line">
+            <a:avLst/>
+          </a:prstGeom>
+          <a:ln w="3600">
+            <a:solidFill>
+              <a:srgbClr val="A04817"/>
+            </a:solidFill>
+          </a:ln>
+        </p:spPr>
+      </p:cxnSp>
+      <p:sp>
+        <p:nvSpPr>
+          <p:cNvPr id="10" name="텍스트"/>
+          <p:cNvSpPr txBox="1"/>
+          <p:nvPr/>
+        </p:nvSpPr>
+        <p:spPr>
+          <a:xfrm>
+            <a:off x="1260000" y="1054800"/>
+            <a:ext cx="331200" cy="91441"/>
+          </a:xfrm>
+          <a:prstGeom prst="rect">
+            <a:avLst/>
+          </a:prstGeom>
+          <a:noFill/>
+        </p:spPr>
+        <p:txBody>
+          <a:bodyPr wrap="square" lIns="0" rIns="0" tIns="0" bIns="0" anchor="t">
+            <a:spAutoFit/>
+          </a:bodyPr>
+          <a:lstStyle/>
+          <a:p>
+            <a:pPr algn="l">
+              <a:lnSpc>
+                <a:spcPts val="696"/>
+              </a:lnSpc>
+            </a:pPr>
+            <a:r>
+              <a:rPr sz="480" b="1" spc="140">
                 <a:solidFill>
                   <a:srgbClr val="46281A"/>
                 </a:solidFill>
@@ -3348,14 +3399,14 @@
       </p:sp>
       <p:sp>
         <p:nvSpPr>
-          <p:cNvPr id="9" name="텍스트"/>
+          <p:cNvPr id="11" name="텍스트"/>
           <p:cNvSpPr txBox="1"/>
           <p:nvPr/>
         </p:nvSpPr>
         <p:spPr>
           <a:xfrm>
-            <a:off x="2023200" y="1317600"/>
-            <a:ext cx="1188000" cy="125731"/>
+            <a:off x="1591200" y="1044000"/>
+            <a:ext cx="1188000" cy="123826"/>
           </a:xfrm>
           <a:prstGeom prst="rect">
             <a:avLst/>
@@ -3370,11 +3421,11 @@
           <a:p>
             <a:pPr algn="l">
               <a:lnSpc>
-                <a:spcPts val="956"/>
+                <a:spcPts val="942"/>
               </a:lnSpc>
             </a:pPr>
             <a:r>
-              <a:rPr sz="660" b="0">
+              <a:rPr sz="650" b="0">
                 <a:solidFill>
                   <a:srgbClr val="12151C"/>
                 </a:solidFill>
@@ -3388,14 +3439,14 @@
       </p:sp>
       <p:sp>
         <p:nvSpPr>
-          <p:cNvPr id="10" name="텍스트"/>
+          <p:cNvPr id="12" name="텍스트"/>
           <p:cNvSpPr txBox="1"/>
           <p:nvPr/>
         </p:nvSpPr>
         <p:spPr>
           <a:xfrm>
-            <a:off x="1692000" y="1458000"/>
-            <a:ext cx="331200" cy="99061"/>
+            <a:off x="1260000" y="1184400"/>
+            <a:ext cx="331200" cy="91441"/>
           </a:xfrm>
           <a:prstGeom prst="rect">
             <a:avLst/>
@@ -3410,11 +3461,11 @@
           <a:p>
             <a:pPr algn="l">
               <a:lnSpc>
-                <a:spcPts val="754"/>
+                <a:spcPts val="696"/>
               </a:lnSpc>
             </a:pPr>
             <a:r>
-              <a:rPr sz="520" b="1" spc="120">
+              <a:rPr sz="480" b="1" spc="140">
                 <a:solidFill>
                   <a:srgbClr val="46281A"/>
                 </a:solidFill>
@@ -3428,14 +3479,14 @@
       </p:sp>
       <p:sp>
         <p:nvSpPr>
-          <p:cNvPr id="11" name="텍스트"/>
+          <p:cNvPr id="13" name="텍스트"/>
           <p:cNvSpPr txBox="1"/>
           <p:nvPr/>
         </p:nvSpPr>
         <p:spPr>
           <a:xfrm>
-            <a:off x="2023200" y="1447200"/>
-            <a:ext cx="1188000" cy="125731"/>
+            <a:off x="1591200" y="1173600"/>
+            <a:ext cx="1188000" cy="123826"/>
           </a:xfrm>
           <a:prstGeom prst="rect">
             <a:avLst/>
@@ -3450,11 +3501,11 @@
           <a:p>
             <a:pPr algn="l">
               <a:lnSpc>
-                <a:spcPts val="956"/>
+                <a:spcPts val="942"/>
               </a:lnSpc>
             </a:pPr>
             <a:r>
-              <a:rPr sz="660" b="0">
+              <a:rPr sz="650" b="0">
                 <a:solidFill>
                   <a:srgbClr val="12151C"/>
                 </a:solidFill>
@@ -3468,14 +3519,14 @@
       </p:sp>
       <p:sp>
         <p:nvSpPr>
-          <p:cNvPr id="12" name="텍스트"/>
+          <p:cNvPr id="14" name="텍스트"/>
           <p:cNvSpPr txBox="1"/>
           <p:nvPr/>
         </p:nvSpPr>
         <p:spPr>
           <a:xfrm>
-            <a:off x="1692000" y="1587600"/>
-            <a:ext cx="331200" cy="99061"/>
+            <a:off x="1260000" y="1314000"/>
+            <a:ext cx="331200" cy="91441"/>
           </a:xfrm>
           <a:prstGeom prst="rect">
             <a:avLst/>
@@ -3490,11 +3541,11 @@
           <a:p>
             <a:pPr algn="l">
               <a:lnSpc>
-                <a:spcPts val="754"/>
+                <a:spcPts val="696"/>
               </a:lnSpc>
             </a:pPr>
             <a:r>
-              <a:rPr sz="520" b="1" spc="120">
+              <a:rPr sz="480" b="1" spc="140">
                 <a:solidFill>
                   <a:srgbClr val="46281A"/>
                 </a:solidFill>
@@ -3508,14 +3559,14 @@
       </p:sp>
       <p:sp>
         <p:nvSpPr>
-          <p:cNvPr id="13" name="텍스트"/>
+          <p:cNvPr id="15" name="텍스트"/>
           <p:cNvSpPr txBox="1"/>
           <p:nvPr/>
         </p:nvSpPr>
         <p:spPr>
           <a:xfrm>
-            <a:off x="2023200" y="1576800"/>
-            <a:ext cx="1188000" cy="125731"/>
+            <a:off x="1591200" y="1303200"/>
+            <a:ext cx="1188000" cy="123826"/>
           </a:xfrm>
           <a:prstGeom prst="rect">
             <a:avLst/>
@@ -3530,11 +3581,11 @@
           <a:p>
             <a:pPr algn="l">
               <a:lnSpc>
-                <a:spcPts val="956"/>
+                <a:spcPts val="942"/>
               </a:lnSpc>
             </a:pPr>
             <a:r>
-              <a:rPr sz="660" b="0">
+              <a:rPr sz="650" b="0">
                 <a:solidFill>
                   <a:srgbClr val="12151C"/>
                 </a:solidFill>
@@ -3574,43 +3625,14 @@
       <p:grpSpPr/>
       <p:sp>
         <p:nvSpPr>
-          <p:cNvPr id="2" name="Rectangle 1"/>
-          <p:cNvSpPr/>
-          <p:nvPr/>
-        </p:nvSpPr>
-        <p:spPr>
-          <a:xfrm>
-            <a:off x="252000" y="540000"/>
-            <a:ext cx="28800" cy="720000"/>
-          </a:xfrm>
-          <a:prstGeom prst="rect">
-            <a:avLst/>
-          </a:prstGeom>
-          <a:solidFill>
-            <a:srgbClr val="FF6A13"/>
-          </a:solidFill>
-          <a:ln>
-            <a:noFill/>
-          </a:ln>
-        </p:spPr>
-        <p:txBody>
-          <a:bodyPr rtlCol="0" anchor="ctr"/>
-          <a:lstStyle/>
-          <a:p>
-            <a:pPr algn="ctr"/>
-          </a:p>
-        </p:txBody>
-      </p:sp>
-      <p:sp>
-        <p:nvSpPr>
-          <p:cNvPr id="3" name="텍스트"/>
+          <p:cNvPr id="2" name="텍스트"/>
           <p:cNvSpPr txBox="1"/>
           <p:nvPr/>
         </p:nvSpPr>
         <p:spPr>
           <a:xfrm>
-            <a:off x="424800" y="612000"/>
-            <a:ext cx="2160000" cy="648000"/>
+            <a:off x="252000" y="223200"/>
+            <a:ext cx="1080000" cy="99061"/>
           </a:xfrm>
           <a:prstGeom prst="rect">
             <a:avLst/>
@@ -3625,32 +3647,154 @@
           <a:p>
             <a:pPr algn="l">
               <a:lnSpc>
-                <a:spcPts val="1812"/>
+                <a:spcPts val="754"/>
               </a:lnSpc>
             </a:pPr>
             <a:r>
-              <a:rPr sz="1250" b="1">
+              <a:rPr sz="520" b="1" spc="240">
+                <a:solidFill>
+                  <a:srgbClr val="6C3519"/>
+                </a:solidFill>
+                <a:latin typeface="맑은 고딕"/>
+                <a:ea typeface="맑은 고딕"/>
+              </a:rPr>
+              <a:t>시술 안내</a:t>
+            </a:r>
+          </a:p>
+        </p:txBody>
+      </p:sp>
+      <p:cxnSp>
+        <p:nvCxnSpPr>
+          <p:cNvPr id="3" name="Connector 2"/>
+          <p:cNvCxnSpPr/>
+          <p:nvPr/>
+        </p:nvCxnSpPr>
+        <p:spPr>
+          <a:xfrm>
+            <a:off x="252000" y="388800"/>
+            <a:ext cx="2736000" cy="0"/>
+          </a:xfrm>
+          <a:prstGeom prst="line">
+            <a:avLst/>
+          </a:prstGeom>
+          <a:ln w="3600">
+            <a:solidFill>
+              <a:srgbClr val="FFD5BD"/>
+            </a:solidFill>
+          </a:ln>
+        </p:spPr>
+      </p:cxnSp>
+      <p:sp>
+        <p:nvSpPr>
+          <p:cNvPr id="4" name="텍스트"/>
+          <p:cNvSpPr txBox="1"/>
+          <p:nvPr/>
+        </p:nvSpPr>
+        <p:spPr>
+          <a:xfrm>
+            <a:off x="252000" y="468000"/>
+            <a:ext cx="216000" cy="99061"/>
+          </a:xfrm>
+          <a:prstGeom prst="rect">
+            <a:avLst/>
+          </a:prstGeom>
+          <a:noFill/>
+        </p:spPr>
+        <p:txBody>
+          <a:bodyPr wrap="square" lIns="0" rIns="0" tIns="0" bIns="0" anchor="t">
+            <a:spAutoFit/>
+          </a:bodyPr>
+          <a:lstStyle/>
+          <a:p>
+            <a:pPr algn="l">
+              <a:lnSpc>
+                <a:spcPts val="754"/>
+              </a:lnSpc>
+            </a:pPr>
+            <a:r>
+              <a:rPr sz="520" b="1" spc="100">
+                <a:solidFill>
+                  <a:srgbClr val="FF6A13"/>
+                </a:solidFill>
+                <a:latin typeface="맑은 고딕"/>
+                <a:ea typeface="맑은 고딕"/>
+              </a:rPr>
+              <a:t>01</a:t>
+            </a:r>
+          </a:p>
+        </p:txBody>
+      </p:sp>
+      <p:sp>
+        <p:nvSpPr>
+          <p:cNvPr id="5" name="텍스트"/>
+          <p:cNvSpPr txBox="1"/>
+          <p:nvPr/>
+        </p:nvSpPr>
+        <p:spPr>
+          <a:xfrm>
+            <a:off x="475200" y="457200"/>
+            <a:ext cx="1152000" cy="140971"/>
+          </a:xfrm>
+          <a:prstGeom prst="rect">
+            <a:avLst/>
+          </a:prstGeom>
+          <a:noFill/>
+        </p:spPr>
+        <p:txBody>
+          <a:bodyPr wrap="square" lIns="0" rIns="0" tIns="0" bIns="0" anchor="t">
+            <a:spAutoFit/>
+          </a:bodyPr>
+          <a:lstStyle/>
+          <a:p>
+            <a:pPr algn="l">
+              <a:lnSpc>
+                <a:spcPts val="1073"/>
+              </a:lnSpc>
+            </a:pPr>
+            <a:r>
+              <a:rPr sz="740" b="0">
                 <a:solidFill>
                   <a:srgbClr val="12151C"/>
                 </a:solidFill>
                 <a:latin typeface="맑은 고딕"/>
                 <a:ea typeface="맑은 고딕"/>
               </a:rPr>
-              <a:t>편안히 쉬었다 가는 시간</a:t>
-            </a:r>
-          </a:p>
-        </p:txBody>
-      </p:sp>
-      <p:sp>
-        <p:nvSpPr>
-          <p:cNvPr id="4" name="텍스트"/>
+              <a:t>펌</a:t>
+            </a:r>
+          </a:p>
+        </p:txBody>
+      </p:sp>
+      <p:cxnSp>
+        <p:nvCxnSpPr>
+          <p:cNvPr id="6" name="Connector 5"/>
+          <p:cNvCxnSpPr/>
+          <p:nvPr/>
+        </p:nvCxnSpPr>
+        <p:spPr>
+          <a:xfrm>
+            <a:off x="252000" y="691200"/>
+            <a:ext cx="1296000" cy="0"/>
+          </a:xfrm>
+          <a:prstGeom prst="line">
+            <a:avLst/>
+          </a:prstGeom>
+          <a:ln w="3600">
+            <a:solidFill>
+              <a:srgbClr val="FFD5BD"/>
+            </a:solidFill>
+          </a:ln>
+        </p:spPr>
+      </p:cxnSp>
+      <p:sp>
+        <p:nvSpPr>
+          <p:cNvPr id="7" name="텍스트"/>
           <p:cNvSpPr txBox="1"/>
           <p:nvPr/>
         </p:nvSpPr>
         <p:spPr>
           <a:xfrm>
-            <a:off x="424800" y="1512000"/>
-            <a:ext cx="1800000" cy="123826"/>
+            <a:off x="1656000" y="468000"/>
+            <a:ext cx="216000" cy="99061"/>
           </a:xfrm>
           <a:prstGeom prst="rect">
             <a:avLst/>
@@ -3665,18 +3809,361 @@
           <a:p>
             <a:pPr algn="l">
               <a:lnSpc>
-                <a:spcPts val="942"/>
+                <a:spcPts val="754"/>
               </a:lnSpc>
             </a:pPr>
             <a:r>
-              <a:rPr sz="650" b="1" spc="200">
+              <a:rPr sz="520" b="1" spc="100">
+                <a:solidFill>
+                  <a:srgbClr val="FF6A13"/>
+                </a:solidFill>
+                <a:latin typeface="맑은 고딕"/>
+                <a:ea typeface="맑은 고딕"/>
+              </a:rPr>
+              <a:t>02</a:t>
+            </a:r>
+          </a:p>
+        </p:txBody>
+      </p:sp>
+      <p:sp>
+        <p:nvSpPr>
+          <p:cNvPr id="8" name="텍스트"/>
+          <p:cNvSpPr txBox="1"/>
+          <p:nvPr/>
+        </p:nvSpPr>
+        <p:spPr>
+          <a:xfrm>
+            <a:off x="1879200" y="457200"/>
+            <a:ext cx="1152000" cy="140971"/>
+          </a:xfrm>
+          <a:prstGeom prst="rect">
+            <a:avLst/>
+          </a:prstGeom>
+          <a:noFill/>
+        </p:spPr>
+        <p:txBody>
+          <a:bodyPr wrap="square" lIns="0" rIns="0" tIns="0" bIns="0" anchor="t">
+            <a:spAutoFit/>
+          </a:bodyPr>
+          <a:lstStyle/>
+          <a:p>
+            <a:pPr algn="l">
+              <a:lnSpc>
+                <a:spcPts val="1073"/>
+              </a:lnSpc>
+            </a:pPr>
+            <a:r>
+              <a:rPr sz="740" b="0">
+                <a:solidFill>
+                  <a:srgbClr val="12151C"/>
+                </a:solidFill>
+                <a:latin typeface="맑은 고딕"/>
+                <a:ea typeface="맑은 고딕"/>
+              </a:rPr>
+              <a:t>염색</a:t>
+            </a:r>
+          </a:p>
+        </p:txBody>
+      </p:sp>
+      <p:cxnSp>
+        <p:nvCxnSpPr>
+          <p:cNvPr id="9" name="Connector 8"/>
+          <p:cNvCxnSpPr/>
+          <p:nvPr/>
+        </p:nvCxnSpPr>
+        <p:spPr>
+          <a:xfrm>
+            <a:off x="1656000" y="691200"/>
+            <a:ext cx="1296000" cy="0"/>
+          </a:xfrm>
+          <a:prstGeom prst="line">
+            <a:avLst/>
+          </a:prstGeom>
+          <a:ln w="3600">
+            <a:solidFill>
+              <a:srgbClr val="FFD5BD"/>
+            </a:solidFill>
+          </a:ln>
+        </p:spPr>
+      </p:cxnSp>
+      <p:sp>
+        <p:nvSpPr>
+          <p:cNvPr id="10" name="텍스트"/>
+          <p:cNvSpPr txBox="1"/>
+          <p:nvPr/>
+        </p:nvSpPr>
+        <p:spPr>
+          <a:xfrm>
+            <a:off x="252000" y="813600"/>
+            <a:ext cx="216000" cy="99061"/>
+          </a:xfrm>
+          <a:prstGeom prst="rect">
+            <a:avLst/>
+          </a:prstGeom>
+          <a:noFill/>
+        </p:spPr>
+        <p:txBody>
+          <a:bodyPr wrap="square" lIns="0" rIns="0" tIns="0" bIns="0" anchor="t">
+            <a:spAutoFit/>
+          </a:bodyPr>
+          <a:lstStyle/>
+          <a:p>
+            <a:pPr algn="l">
+              <a:lnSpc>
+                <a:spcPts val="754"/>
+              </a:lnSpc>
+            </a:pPr>
+            <a:r>
+              <a:rPr sz="520" b="1" spc="100">
+                <a:solidFill>
+                  <a:srgbClr val="FF6A13"/>
+                </a:solidFill>
+                <a:latin typeface="맑은 고딕"/>
+                <a:ea typeface="맑은 고딕"/>
+              </a:rPr>
+              <a:t>03</a:t>
+            </a:r>
+          </a:p>
+        </p:txBody>
+      </p:sp>
+      <p:sp>
+        <p:nvSpPr>
+          <p:cNvPr id="11" name="텍스트"/>
+          <p:cNvSpPr txBox="1"/>
+          <p:nvPr/>
+        </p:nvSpPr>
+        <p:spPr>
+          <a:xfrm>
+            <a:off x="475200" y="802800"/>
+            <a:ext cx="1152000" cy="140971"/>
+          </a:xfrm>
+          <a:prstGeom prst="rect">
+            <a:avLst/>
+          </a:prstGeom>
+          <a:noFill/>
+        </p:spPr>
+        <p:txBody>
+          <a:bodyPr wrap="square" lIns="0" rIns="0" tIns="0" bIns="0" anchor="t">
+            <a:spAutoFit/>
+          </a:bodyPr>
+          <a:lstStyle/>
+          <a:p>
+            <a:pPr algn="l">
+              <a:lnSpc>
+                <a:spcPts val="1073"/>
+              </a:lnSpc>
+            </a:pPr>
+            <a:r>
+              <a:rPr sz="740" b="0">
+                <a:solidFill>
+                  <a:srgbClr val="12151C"/>
+                </a:solidFill>
+                <a:latin typeface="맑은 고딕"/>
+                <a:ea typeface="맑은 고딕"/>
+              </a:rPr>
+              <a:t>네일 아트</a:t>
+            </a:r>
+          </a:p>
+        </p:txBody>
+      </p:sp>
+      <p:cxnSp>
+        <p:nvCxnSpPr>
+          <p:cNvPr id="12" name="Connector 11"/>
+          <p:cNvCxnSpPr/>
+          <p:nvPr/>
+        </p:nvCxnSpPr>
+        <p:spPr>
+          <a:xfrm>
+            <a:off x="252000" y="1036800"/>
+            <a:ext cx="1296000" cy="0"/>
+          </a:xfrm>
+          <a:prstGeom prst="line">
+            <a:avLst/>
+          </a:prstGeom>
+          <a:ln w="3600">
+            <a:solidFill>
+              <a:srgbClr val="FFD5BD"/>
+            </a:solidFill>
+          </a:ln>
+        </p:spPr>
+      </p:cxnSp>
+      <p:sp>
+        <p:nvSpPr>
+          <p:cNvPr id="13" name="텍스트"/>
+          <p:cNvSpPr txBox="1"/>
+          <p:nvPr/>
+        </p:nvSpPr>
+        <p:spPr>
+          <a:xfrm>
+            <a:off x="1656000" y="813600"/>
+            <a:ext cx="216000" cy="99061"/>
+          </a:xfrm>
+          <a:prstGeom prst="rect">
+            <a:avLst/>
+          </a:prstGeom>
+          <a:noFill/>
+        </p:spPr>
+        <p:txBody>
+          <a:bodyPr wrap="square" lIns="0" rIns="0" tIns="0" bIns="0" anchor="t">
+            <a:spAutoFit/>
+          </a:bodyPr>
+          <a:lstStyle/>
+          <a:p>
+            <a:pPr algn="l">
+              <a:lnSpc>
+                <a:spcPts val="754"/>
+              </a:lnSpc>
+            </a:pPr>
+            <a:r>
+              <a:rPr sz="520" b="1" spc="100">
+                <a:solidFill>
+                  <a:srgbClr val="FF6A13"/>
+                </a:solidFill>
+                <a:latin typeface="맑은 고딕"/>
+                <a:ea typeface="맑은 고딕"/>
+              </a:rPr>
+              <a:t>04</a:t>
+            </a:r>
+          </a:p>
+        </p:txBody>
+      </p:sp>
+      <p:sp>
+        <p:nvSpPr>
+          <p:cNvPr id="14" name="텍스트"/>
+          <p:cNvSpPr txBox="1"/>
+          <p:nvPr/>
+        </p:nvSpPr>
+        <p:spPr>
+          <a:xfrm>
+            <a:off x="1879200" y="802800"/>
+            <a:ext cx="1152000" cy="140971"/>
+          </a:xfrm>
+          <a:prstGeom prst="rect">
+            <a:avLst/>
+          </a:prstGeom>
+          <a:noFill/>
+        </p:spPr>
+        <p:txBody>
+          <a:bodyPr wrap="square" lIns="0" rIns="0" tIns="0" bIns="0" anchor="t">
+            <a:spAutoFit/>
+          </a:bodyPr>
+          <a:lstStyle/>
+          <a:p>
+            <a:pPr algn="l">
+              <a:lnSpc>
+                <a:spcPts val="1073"/>
+              </a:lnSpc>
+            </a:pPr>
+            <a:r>
+              <a:rPr sz="740" b="0">
+                <a:solidFill>
+                  <a:srgbClr val="12151C"/>
+                </a:solidFill>
+                <a:latin typeface="맑은 고딕"/>
+                <a:ea typeface="맑은 고딕"/>
+              </a:rPr>
+              <a:t>속눈썹</a:t>
+            </a:r>
+          </a:p>
+        </p:txBody>
+      </p:sp>
+      <p:cxnSp>
+        <p:nvCxnSpPr>
+          <p:cNvPr id="15" name="Connector 14"/>
+          <p:cNvCxnSpPr/>
+          <p:nvPr/>
+        </p:nvCxnSpPr>
+        <p:spPr>
+          <a:xfrm>
+            <a:off x="1656000" y="1036800"/>
+            <a:ext cx="1296000" cy="0"/>
+          </a:xfrm>
+          <a:prstGeom prst="line">
+            <a:avLst/>
+          </a:prstGeom>
+          <a:ln w="3600">
+            <a:solidFill>
+              <a:srgbClr val="FFD5BD"/>
+            </a:solidFill>
+          </a:ln>
+        </p:spPr>
+      </p:cxnSp>
+      <p:sp>
+        <p:nvSpPr>
+          <p:cNvPr id="16" name="텍스트"/>
+          <p:cNvSpPr txBox="1"/>
+          <p:nvPr/>
+        </p:nvSpPr>
+        <p:spPr>
+          <a:xfrm>
+            <a:off x="252000" y="1569600"/>
+            <a:ext cx="1368000" cy="114301"/>
+          </a:xfrm>
+          <a:prstGeom prst="rect">
+            <a:avLst/>
+          </a:prstGeom>
+          <a:noFill/>
+        </p:spPr>
+        <p:txBody>
+          <a:bodyPr wrap="square" lIns="0" rIns="0" tIns="0" bIns="0" anchor="t">
+            <a:spAutoFit/>
+          </a:bodyPr>
+          <a:lstStyle/>
+          <a:p>
+            <a:pPr algn="l">
+              <a:lnSpc>
+                <a:spcPts val="869"/>
+              </a:lnSpc>
+            </a:pPr>
+            <a:r>
+              <a:rPr sz="600" b="0">
                 <a:solidFill>
                   <a:srgbClr val="6C3519"/>
                 </a:solidFill>
                 <a:latin typeface="맑은 고딕"/>
                 <a:ea typeface="맑은 고딕"/>
               </a:rPr>
-              <a:t>샵 이름</a:t>
+              <a:t>화–일 10:00 – 20:00</a:t>
+            </a:r>
+          </a:p>
+        </p:txBody>
+      </p:sp>
+      <p:sp>
+        <p:nvSpPr>
+          <p:cNvPr id="17" name="텍스트"/>
+          <p:cNvSpPr txBox="1"/>
+          <p:nvPr/>
+        </p:nvSpPr>
+        <p:spPr>
+          <a:xfrm>
+            <a:off x="1620000" y="1569600"/>
+            <a:ext cx="1368000" cy="114301"/>
+          </a:xfrm>
+          <a:prstGeom prst="rect">
+            <a:avLst/>
+          </a:prstGeom>
+          <a:noFill/>
+        </p:spPr>
+        <p:txBody>
+          <a:bodyPr wrap="square" lIns="0" rIns="0" tIns="0" bIns="0" anchor="t">
+            <a:spAutoFit/>
+          </a:bodyPr>
+          <a:lstStyle/>
+          <a:p>
+            <a:pPr algn="r">
+              <a:lnSpc>
+                <a:spcPts val="869"/>
+              </a:lnSpc>
+            </a:pPr>
+            <a:r>
+              <a:rPr sz="600" b="0">
+                <a:solidFill>
+                  <a:srgbClr val="6C3519"/>
+                </a:solidFill>
+                <a:latin typeface="맑은 고딕"/>
+                <a:ea typeface="맑은 고딕"/>
+              </a:rPr>
+              <a:t>www.example.com</a:t>
             </a:r>
           </a:p>
         </p:txBody>
